--- a/python/ex9/2412747_kadai9.pptx
+++ b/python/ex9/2412747_kadai9.pptx
@@ -6,6 +6,8 @@
   </p:sldMasterIdLst>
   <p:sldIdLst>
     <p:sldId id="257" r:id="rId2"/>
+    <p:sldId id="258" r:id="rId3"/>
+    <p:sldId id="259" r:id="rId4"/>
   </p:sldIdLst>
   <p:sldSz cx="12192000" cy="6858000"/>
   <p:notesSz cx="6858000" cy="9144000"/>
@@ -3652,7 +3654,7 @@
         <p:spPr>
           <a:xfrm>
             <a:off x="838200" y="1690688"/>
-            <a:ext cx="7914346" cy="2677656"/>
+            <a:ext cx="9110186" cy="4154984"/>
           </a:xfrm>
           <a:prstGeom prst="rect">
             <a:avLst/>
@@ -3734,7 +3736,39 @@
           <a:p>
             <a:r>
               <a:rPr kumimoji="1" lang="ja-JP" altLang="en-US" sz="2400"/>
-              <a:t>グーとチョキとパーを場合わけしてみると、</a:t>
+              <a:t>グーとチョキとパーは指の形が違う</a:t>
+            </a:r>
+            <a:endParaRPr kumimoji="1" lang="en-US" altLang="ja-JP" sz="2400" dirty="0"/>
+          </a:p>
+          <a:p>
+            <a:r>
+              <a:rPr lang="en-US" altLang="ja-JP" sz="2400" dirty="0"/>
+              <a:t>→</a:t>
+            </a:r>
+            <a:r>
+              <a:rPr lang="ja-JP" altLang="en-US" sz="2400"/>
+              <a:t>手全体を見た時に輪郭の凸凹具合で場合分けできるのでは？</a:t>
+            </a:r>
+            <a:endParaRPr lang="en-US" altLang="ja-JP" sz="2400" dirty="0"/>
+          </a:p>
+          <a:p>
+            <a:r>
+              <a:rPr kumimoji="1" lang="en-US" altLang="ja-JP" sz="2400" dirty="0"/>
+              <a:t>→</a:t>
+            </a:r>
+            <a:r>
+              <a:rPr kumimoji="1" lang="ja-JP" altLang="en-US" sz="2400"/>
+              <a:t>つまり、手を抽出して、輪郭を抽出して、凸凹度合いを判定！</a:t>
+            </a:r>
+            <a:endParaRPr kumimoji="1" lang="en-US" altLang="ja-JP" sz="2400" dirty="0"/>
+          </a:p>
+          <a:p>
+            <a:endParaRPr lang="en-US" altLang="ja-JP" sz="2400" dirty="0"/>
+          </a:p>
+          <a:p>
+            <a:r>
+              <a:rPr kumimoji="1" lang="ja-JP" altLang="en-US" sz="2400"/>
+              <a:t>これで手の形がわかった！</a:t>
             </a:r>
             <a:endParaRPr kumimoji="1" lang="en-US" altLang="ja-JP" sz="2400" dirty="0"/>
           </a:p>
@@ -3747,6 +3781,154 @@
     <p:extLst>
       <p:ext uri="{BB962C8B-B14F-4D97-AF65-F5344CB8AC3E}">
         <p14:creationId xmlns:p14="http://schemas.microsoft.com/office/powerpoint/2010/main" val="941853796"/>
+      </p:ext>
+    </p:extLst>
+  </p:cSld>
+  <p:clrMapOvr>
+    <a:masterClrMapping/>
+  </p:clrMapOvr>
+</p:sld>
+</file>
+
+<file path=ppt/slides/slide2.xml><?xml version="1.0" encoding="utf-8"?>
+<p:sld xmlns:a="http://schemas.openxmlformats.org/drawingml/2006/main" xmlns:r="http://schemas.openxmlformats.org/officeDocument/2006/relationships" xmlns:p="http://schemas.openxmlformats.org/presentationml/2006/main">
+  <p:cSld>
+    <p:spTree>
+      <p:nvGrpSpPr>
+        <p:cNvPr id="1" name=""/>
+        <p:cNvGrpSpPr/>
+        <p:nvPr/>
+      </p:nvGrpSpPr>
+      <p:grpSpPr>
+        <a:xfrm>
+          <a:off x="0" y="0"/>
+          <a:ext cx="0" cy="0"/>
+          <a:chOff x="0" y="0"/>
+          <a:chExt cx="0" cy="0"/>
+        </a:xfrm>
+      </p:grpSpPr>
+      <p:sp>
+        <p:nvSpPr>
+          <p:cNvPr id="2" name="タイトル 1">
+            <a:extLst>
+              <a:ext uri="{FF2B5EF4-FFF2-40B4-BE49-F238E27FC236}">
+                <a16:creationId xmlns:a16="http://schemas.microsoft.com/office/drawing/2014/main" id="{01340E8F-106B-DD85-8AC5-AC1313F81CED}"/>
+              </a:ext>
+            </a:extLst>
+          </p:cNvPr>
+          <p:cNvSpPr>
+            <a:spLocks noGrp="1"/>
+          </p:cNvSpPr>
+          <p:nvPr>
+            <p:ph type="title"/>
+          </p:nvPr>
+        </p:nvSpPr>
+        <p:spPr/>
+        <p:txBody>
+          <a:bodyPr/>
+          <a:lstStyle/>
+          <a:p>
+            <a:r>
+              <a:rPr kumimoji="1" lang="ja-JP" altLang="en-US"/>
+              <a:t>手の抽出</a:t>
+            </a:r>
+          </a:p>
+        </p:txBody>
+      </p:sp>
+      <p:sp>
+        <p:nvSpPr>
+          <p:cNvPr id="3" name="テキスト ボックス 2">
+            <a:extLst>
+              <a:ext uri="{FF2B5EF4-FFF2-40B4-BE49-F238E27FC236}">
+                <a16:creationId xmlns:a16="http://schemas.microsoft.com/office/drawing/2014/main" id="{7AFFBFCE-2FBA-B55A-DBC8-7154CF8D72AF}"/>
+              </a:ext>
+            </a:extLst>
+          </p:cNvPr>
+          <p:cNvSpPr txBox="1"/>
+          <p:nvPr/>
+        </p:nvSpPr>
+        <p:spPr>
+          <a:xfrm>
+            <a:off x="838200" y="1690688"/>
+            <a:ext cx="7263527" cy="461665"/>
+          </a:xfrm>
+          <a:prstGeom prst="rect">
+            <a:avLst/>
+          </a:prstGeom>
+          <a:noFill/>
+        </p:spPr>
+        <p:txBody>
+          <a:bodyPr wrap="none" rtlCol="0">
+            <a:spAutoFit/>
+          </a:bodyPr>
+          <a:lstStyle/>
+          <a:p>
+            <a:r>
+              <a:rPr kumimoji="1" lang="ja-JP" altLang="en-US" sz="2400"/>
+              <a:t>赤色物体抽出のときのように、肌色部分を抽出する</a:t>
+            </a:r>
+          </a:p>
+        </p:txBody>
+      </p:sp>
+    </p:spTree>
+    <p:extLst>
+      <p:ext uri="{BB962C8B-B14F-4D97-AF65-F5344CB8AC3E}">
+        <p14:creationId xmlns:p14="http://schemas.microsoft.com/office/powerpoint/2010/main" val="2622906638"/>
+      </p:ext>
+    </p:extLst>
+  </p:cSld>
+  <p:clrMapOvr>
+    <a:masterClrMapping/>
+  </p:clrMapOvr>
+</p:sld>
+</file>
+
+<file path=ppt/slides/slide3.xml><?xml version="1.0" encoding="utf-8"?>
+<p:sld xmlns:a="http://schemas.openxmlformats.org/drawingml/2006/main" xmlns:r="http://schemas.openxmlformats.org/officeDocument/2006/relationships" xmlns:p="http://schemas.openxmlformats.org/presentationml/2006/main">
+  <p:cSld>
+    <p:spTree>
+      <p:nvGrpSpPr>
+        <p:cNvPr id="1" name=""/>
+        <p:cNvGrpSpPr/>
+        <p:nvPr/>
+      </p:nvGrpSpPr>
+      <p:grpSpPr>
+        <a:xfrm>
+          <a:off x="0" y="0"/>
+          <a:ext cx="0" cy="0"/>
+          <a:chOff x="0" y="0"/>
+          <a:chExt cx="0" cy="0"/>
+        </a:xfrm>
+      </p:grpSpPr>
+      <p:sp>
+        <p:nvSpPr>
+          <p:cNvPr id="2" name="タイトル 1">
+            <a:extLst>
+              <a:ext uri="{FF2B5EF4-FFF2-40B4-BE49-F238E27FC236}">
+                <a16:creationId xmlns:a16="http://schemas.microsoft.com/office/drawing/2014/main" id="{38B32DC9-0B44-A274-FF94-3A88FEBA07DD}"/>
+              </a:ext>
+            </a:extLst>
+          </p:cNvPr>
+          <p:cNvSpPr>
+            <a:spLocks noGrp="1"/>
+          </p:cNvSpPr>
+          <p:nvPr>
+            <p:ph type="title"/>
+          </p:nvPr>
+        </p:nvSpPr>
+        <p:spPr/>
+        <p:txBody>
+          <a:bodyPr/>
+          <a:lstStyle/>
+          <a:p>
+            <a:endParaRPr kumimoji="1" lang="ja-JP" altLang="en-US"/>
+          </a:p>
+        </p:txBody>
+      </p:sp>
+    </p:spTree>
+    <p:extLst>
+      <p:ext uri="{BB962C8B-B14F-4D97-AF65-F5344CB8AC3E}">
+        <p14:creationId xmlns:p14="http://schemas.microsoft.com/office/powerpoint/2010/main" val="1598116917"/>
       </p:ext>
     </p:extLst>
   </p:cSld>

--- a/python/ex9/2412747_kadai9.pptx
+++ b/python/ex9/2412747_kadai9.pptx
@@ -8,6 +8,7 @@
     <p:sldId id="257" r:id="rId2"/>
     <p:sldId id="258" r:id="rId3"/>
     <p:sldId id="259" r:id="rId4"/>
+    <p:sldId id="260" r:id="rId5"/>
   </p:sldIdLst>
   <p:sldSz cx="12192000" cy="6858000"/>
   <p:notesSz cx="6858000" cy="9144000"/>
@@ -106,6 +107,11 @@
       </a:defRPr>
     </a:lvl9pPr>
   </p:defaultTextStyle>
+  <p:extLst>
+    <p:ext uri="{EFAFB233-063F-42B5-8137-9DF3F51BA10A}">
+      <p15:sldGuideLst xmlns:p15="http://schemas.microsoft.com/office/powerpoint/2012/main"/>
+    </p:ext>
+  </p:extLst>
 </p:presentation>
 </file>
 
@@ -3654,7 +3660,7 @@
         <p:spPr>
           <a:xfrm>
             <a:off x="838200" y="1690688"/>
-            <a:ext cx="9110186" cy="4154984"/>
+            <a:ext cx="9530173" cy="4154984"/>
           </a:xfrm>
           <a:prstGeom prst="rect">
             <a:avLst/>
@@ -3758,7 +3764,7 @@
             </a:r>
             <a:r>
               <a:rPr kumimoji="1" lang="ja-JP" altLang="en-US" sz="2400"/>
-              <a:t>つまり、手を抽出して、輪郭を抽出して、凸凹度合いを判定！</a:t>
+              <a:t>つまり、肌色を抽出して、輪郭を抽出して、凸凹度合いを判定！</a:t>
             </a:r>
             <a:endParaRPr kumimoji="1" lang="en-US" altLang="ja-JP" sz="2400" dirty="0"/>
           </a:p>
@@ -3768,7 +3774,7 @@
           <a:p>
             <a:r>
               <a:rPr kumimoji="1" lang="ja-JP" altLang="en-US" sz="2400"/>
-              <a:t>これで手の形がわかった！</a:t>
+              <a:t>これで手の形がわかる！</a:t>
             </a:r>
             <a:endParaRPr kumimoji="1" lang="en-US" altLang="ja-JP" sz="2400" dirty="0"/>
           </a:p>
@@ -3829,8 +3835,12 @@
           <a:lstStyle/>
           <a:p>
             <a:r>
-              <a:rPr kumimoji="1" lang="ja-JP" altLang="en-US"/>
-              <a:t>手の抽出</a:t>
+              <a:rPr lang="ja-JP" altLang="en-US"/>
+              <a:t>肌色</a:t>
+            </a:r>
+            <a:r>
+              <a:rPr kumimoji="1" lang="ja-JP" altLang="en-US"/>
+              <a:t>の抽出</a:t>
             </a:r>
           </a:p>
         </p:txBody>
@@ -3850,7 +3860,7 @@
         <p:spPr>
           <a:xfrm>
             <a:off x="838200" y="1690688"/>
-            <a:ext cx="7263527" cy="461665"/>
+            <a:ext cx="10610597" cy="1938992"/>
           </a:xfrm>
           <a:prstGeom prst="rect">
             <a:avLst/>
@@ -3867,9 +3877,311 @@
               <a:rPr kumimoji="1" lang="ja-JP" altLang="en-US" sz="2400"/>
               <a:t>赤色物体抽出のときのように、肌色部分を抽出する</a:t>
             </a:r>
-          </a:p>
-        </p:txBody>
-      </p:sp>
+            <a:endParaRPr kumimoji="1" lang="en-US" altLang="ja-JP" sz="2400" dirty="0"/>
+          </a:p>
+          <a:p>
+            <a:r>
+              <a:rPr lang="ja-JP" altLang="en-US" sz="2400"/>
+              <a:t>したがって今回も</a:t>
+            </a:r>
+            <a:r>
+              <a:rPr lang="en-US" altLang="ja-JP" sz="2400" dirty="0"/>
+              <a:t>HSV</a:t>
+            </a:r>
+            <a:r>
+              <a:rPr lang="ja-JP" altLang="en-US" sz="2400"/>
+              <a:t>変換を利用する</a:t>
+            </a:r>
+            <a:endParaRPr lang="en-US" altLang="ja-JP" sz="2400" dirty="0"/>
+          </a:p>
+          <a:p>
+            <a:r>
+              <a:rPr kumimoji="1" lang="ja-JP" altLang="en-US" sz="2400"/>
+              <a:t>色相</a:t>
+            </a:r>
+            <a:r>
+              <a:rPr kumimoji="1" lang="en-US" altLang="ja-JP" sz="2400" dirty="0"/>
+              <a:t>0~25</a:t>
+            </a:r>
+            <a:r>
+              <a:rPr kumimoji="1" lang="ja-JP" altLang="en-US" sz="2400"/>
+              <a:t>ぐらい、彩度</a:t>
+            </a:r>
+            <a:r>
+              <a:rPr lang="en-US" altLang="ja-JP" sz="2400" dirty="0"/>
+              <a:t>30~150</a:t>
+            </a:r>
+            <a:r>
+              <a:rPr lang="ja-JP" altLang="en-US" sz="2400"/>
+              <a:t>ぐらい、明度は上限が低くなければなんでも</a:t>
+            </a:r>
+            <a:endParaRPr lang="en-US" altLang="ja-JP" sz="2400" dirty="0"/>
+          </a:p>
+          <a:p>
+            <a:endParaRPr kumimoji="1" lang="en-US" altLang="ja-JP" sz="2400" dirty="0"/>
+          </a:p>
+          <a:p>
+            <a:endParaRPr kumimoji="1" lang="ja-JP" altLang="en-US" sz="2400"/>
+          </a:p>
+        </p:txBody>
+      </p:sp>
+      <p:sp>
+        <p:nvSpPr>
+          <p:cNvPr id="4" name="正方形/長方形 3">
+            <a:extLst>
+              <a:ext uri="{FF2B5EF4-FFF2-40B4-BE49-F238E27FC236}">
+                <a16:creationId xmlns:a16="http://schemas.microsoft.com/office/drawing/2014/main" id="{1F4061B4-4B0C-CE3A-D4F7-CAA87B151332}"/>
+              </a:ext>
+            </a:extLst>
+          </p:cNvPr>
+          <p:cNvSpPr/>
+          <p:nvPr/>
+        </p:nvSpPr>
+        <p:spPr>
+          <a:xfrm>
+            <a:off x="708339" y="4574884"/>
+            <a:ext cx="2768957" cy="1169093"/>
+          </a:xfrm>
+          <a:prstGeom prst="rect">
+            <a:avLst/>
+          </a:prstGeom>
+        </p:spPr>
+        <p:style>
+          <a:lnRef idx="2">
+            <a:schemeClr val="accent1">
+              <a:shade val="15000"/>
+            </a:schemeClr>
+          </a:lnRef>
+          <a:fillRef idx="1">
+            <a:schemeClr val="accent1"/>
+          </a:fillRef>
+          <a:effectRef idx="0">
+            <a:schemeClr val="accent1"/>
+          </a:effectRef>
+          <a:fontRef idx="minor">
+            <a:schemeClr val="lt1"/>
+          </a:fontRef>
+        </p:style>
+        <p:txBody>
+          <a:bodyPr rtlCol="0" anchor="ctr"/>
+          <a:lstStyle/>
+          <a:p>
+            <a:pPr algn="ctr"/>
+            <a:r>
+              <a:rPr kumimoji="1" lang="ja-JP" altLang="en-US">
+                <a:solidFill>
+                  <a:sysClr val="windowText" lastClr="000000"/>
+                </a:solidFill>
+              </a:rPr>
+              <a:t>元の画像</a:t>
+            </a:r>
+          </a:p>
+        </p:txBody>
+      </p:sp>
+      <p:sp>
+        <p:nvSpPr>
+          <p:cNvPr id="5" name="正方形/長方形 4">
+            <a:extLst>
+              <a:ext uri="{FF2B5EF4-FFF2-40B4-BE49-F238E27FC236}">
+                <a16:creationId xmlns:a16="http://schemas.microsoft.com/office/drawing/2014/main" id="{84971879-4B9C-F8DF-E279-6C9F6DF497F5}"/>
+              </a:ext>
+            </a:extLst>
+          </p:cNvPr>
+          <p:cNvSpPr/>
+          <p:nvPr/>
+        </p:nvSpPr>
+        <p:spPr>
+          <a:xfrm>
+            <a:off x="4711521" y="4574883"/>
+            <a:ext cx="2768957" cy="1169093"/>
+          </a:xfrm>
+          <a:prstGeom prst="rect">
+            <a:avLst/>
+          </a:prstGeom>
+          <a:solidFill>
+            <a:schemeClr val="bg2"/>
+          </a:solidFill>
+        </p:spPr>
+        <p:style>
+          <a:lnRef idx="2">
+            <a:schemeClr val="accent1">
+              <a:shade val="15000"/>
+            </a:schemeClr>
+          </a:lnRef>
+          <a:fillRef idx="1">
+            <a:schemeClr val="accent1"/>
+          </a:fillRef>
+          <a:effectRef idx="0">
+            <a:schemeClr val="accent1"/>
+          </a:effectRef>
+          <a:fontRef idx="minor">
+            <a:schemeClr val="lt1"/>
+          </a:fontRef>
+        </p:style>
+        <p:txBody>
+          <a:bodyPr rtlCol="0" anchor="ctr"/>
+          <a:lstStyle/>
+          <a:p>
+            <a:pPr algn="ctr"/>
+            <a:r>
+              <a:rPr kumimoji="1" lang="en-US" altLang="ja-JP" dirty="0">
+                <a:solidFill>
+                  <a:sysClr val="windowText" lastClr="000000"/>
+                </a:solidFill>
+              </a:rPr>
+              <a:t>HSV</a:t>
+            </a:r>
+            <a:r>
+              <a:rPr kumimoji="1" lang="ja-JP" altLang="en-US">
+                <a:solidFill>
+                  <a:sysClr val="windowText" lastClr="000000"/>
+                </a:solidFill>
+              </a:rPr>
+              <a:t>変換</a:t>
+            </a:r>
+          </a:p>
+        </p:txBody>
+      </p:sp>
+      <p:sp>
+        <p:nvSpPr>
+          <p:cNvPr id="6" name="正方形/長方形 5">
+            <a:extLst>
+              <a:ext uri="{FF2B5EF4-FFF2-40B4-BE49-F238E27FC236}">
+                <a16:creationId xmlns:a16="http://schemas.microsoft.com/office/drawing/2014/main" id="{2067DA8B-2841-26EB-887D-BA15C27BC9E5}"/>
+              </a:ext>
+            </a:extLst>
+          </p:cNvPr>
+          <p:cNvSpPr/>
+          <p:nvPr/>
+        </p:nvSpPr>
+        <p:spPr>
+          <a:xfrm>
+            <a:off x="8714704" y="4574882"/>
+            <a:ext cx="2768957" cy="1169093"/>
+          </a:xfrm>
+          <a:prstGeom prst="rect">
+            <a:avLst/>
+          </a:prstGeom>
+          <a:solidFill>
+            <a:schemeClr val="accent2">
+              <a:lumMod val="20000"/>
+              <a:lumOff val="80000"/>
+            </a:schemeClr>
+          </a:solidFill>
+        </p:spPr>
+        <p:style>
+          <a:lnRef idx="2">
+            <a:schemeClr val="accent1">
+              <a:shade val="15000"/>
+            </a:schemeClr>
+          </a:lnRef>
+          <a:fillRef idx="1">
+            <a:schemeClr val="accent1"/>
+          </a:fillRef>
+          <a:effectRef idx="0">
+            <a:schemeClr val="accent1"/>
+          </a:effectRef>
+          <a:fontRef idx="minor">
+            <a:schemeClr val="lt1"/>
+          </a:fontRef>
+        </p:style>
+        <p:txBody>
+          <a:bodyPr rtlCol="0" anchor="ctr"/>
+          <a:lstStyle/>
+          <a:p>
+            <a:pPr algn="ctr"/>
+            <a:r>
+              <a:rPr kumimoji="1" lang="ja-JP" altLang="en-US">
+                <a:solidFill>
+                  <a:sysClr val="windowText" lastClr="000000"/>
+                </a:solidFill>
+              </a:rPr>
+              <a:t>肌色抽出</a:t>
+            </a:r>
+          </a:p>
+        </p:txBody>
+      </p:sp>
+      <p:cxnSp>
+        <p:nvCxnSpPr>
+          <p:cNvPr id="8" name="直線矢印コネクタ 7">
+            <a:extLst>
+              <a:ext uri="{FF2B5EF4-FFF2-40B4-BE49-F238E27FC236}">
+                <a16:creationId xmlns:a16="http://schemas.microsoft.com/office/drawing/2014/main" id="{E1416464-3FF3-A92E-DE01-D8849B279F11}"/>
+              </a:ext>
+            </a:extLst>
+          </p:cNvPr>
+          <p:cNvCxnSpPr>
+            <a:stCxn id="4" idx="3"/>
+            <a:endCxn id="5" idx="1"/>
+          </p:cNvCxnSpPr>
+          <p:nvPr/>
+        </p:nvCxnSpPr>
+        <p:spPr>
+          <a:xfrm flipV="1">
+            <a:off x="3477296" y="5159430"/>
+            <a:ext cx="1234225" cy="1"/>
+          </a:xfrm>
+          <a:prstGeom prst="straightConnector1">
+            <a:avLst/>
+          </a:prstGeom>
+          <a:ln>
+            <a:tailEnd type="triangle"/>
+          </a:ln>
+        </p:spPr>
+        <p:style>
+          <a:lnRef idx="2">
+            <a:schemeClr val="accent1"/>
+          </a:lnRef>
+          <a:fillRef idx="0">
+            <a:schemeClr val="accent1"/>
+          </a:fillRef>
+          <a:effectRef idx="1">
+            <a:schemeClr val="accent1"/>
+          </a:effectRef>
+          <a:fontRef idx="minor">
+            <a:schemeClr val="tx1"/>
+          </a:fontRef>
+        </p:style>
+      </p:cxnSp>
+      <p:cxnSp>
+        <p:nvCxnSpPr>
+          <p:cNvPr id="9" name="直線矢印コネクタ 8">
+            <a:extLst>
+              <a:ext uri="{FF2B5EF4-FFF2-40B4-BE49-F238E27FC236}">
+                <a16:creationId xmlns:a16="http://schemas.microsoft.com/office/drawing/2014/main" id="{44A22FEF-C036-7F81-1FB5-7B1C4E9B9326}"/>
+              </a:ext>
+            </a:extLst>
+          </p:cNvPr>
+          <p:cNvCxnSpPr/>
+          <p:nvPr/>
+        </p:nvCxnSpPr>
+        <p:spPr>
+          <a:xfrm flipV="1">
+            <a:off x="7480478" y="5167312"/>
+            <a:ext cx="1234225" cy="1"/>
+          </a:xfrm>
+          <a:prstGeom prst="straightConnector1">
+            <a:avLst/>
+          </a:prstGeom>
+          <a:ln>
+            <a:tailEnd type="triangle"/>
+          </a:ln>
+        </p:spPr>
+        <p:style>
+          <a:lnRef idx="2">
+            <a:schemeClr val="accent1"/>
+          </a:lnRef>
+          <a:fillRef idx="0">
+            <a:schemeClr val="accent1"/>
+          </a:fillRef>
+          <a:effectRef idx="1">
+            <a:schemeClr val="accent1"/>
+          </a:effectRef>
+          <a:fontRef idx="minor">
+            <a:schemeClr val="tx1"/>
+          </a:fontRef>
+        </p:style>
+      </p:cxnSp>
     </p:spTree>
     <p:extLst>
       <p:ext uri="{BB962C8B-B14F-4D97-AF65-F5344CB8AC3E}">
@@ -3921,7 +4233,59 @@
           <a:bodyPr/>
           <a:lstStyle/>
           <a:p>
-            <a:endParaRPr kumimoji="1" lang="ja-JP" altLang="en-US"/>
+            <a:r>
+              <a:rPr kumimoji="1" lang="ja-JP" altLang="en-US"/>
+              <a:t>輪郭の抽出</a:t>
+            </a:r>
+          </a:p>
+        </p:txBody>
+      </p:sp>
+      <p:sp>
+        <p:nvSpPr>
+          <p:cNvPr id="3" name="テキスト ボックス 2">
+            <a:extLst>
+              <a:ext uri="{FF2B5EF4-FFF2-40B4-BE49-F238E27FC236}">
+                <a16:creationId xmlns:a16="http://schemas.microsoft.com/office/drawing/2014/main" id="{EEC5842D-D961-3218-B46C-1111E9BBF9BA}"/>
+              </a:ext>
+            </a:extLst>
+          </p:cNvPr>
+          <p:cNvSpPr txBox="1"/>
+          <p:nvPr/>
+        </p:nvSpPr>
+        <p:spPr>
+          <a:xfrm>
+            <a:off x="838200" y="1694244"/>
+            <a:ext cx="8494633" cy="1569660"/>
+          </a:xfrm>
+          <a:prstGeom prst="rect">
+            <a:avLst/>
+          </a:prstGeom>
+          <a:noFill/>
+        </p:spPr>
+        <p:txBody>
+          <a:bodyPr wrap="none" rtlCol="0">
+            <a:spAutoFit/>
+          </a:bodyPr>
+          <a:lstStyle/>
+          <a:p>
+            <a:r>
+              <a:rPr lang="ja-JP" altLang="en-US" sz="2400"/>
+              <a:t>肌色が抽出できたが、今回の動画には腕も映っている</a:t>
+            </a:r>
+            <a:endParaRPr lang="en-US" altLang="ja-JP" sz="2400" dirty="0"/>
+          </a:p>
+          <a:p>
+            <a:r>
+              <a:rPr kumimoji="1" lang="ja-JP" altLang="en-US" sz="2400"/>
+              <a:t>そのため、考えなしにやると腕の情報まで含まれてしまう！</a:t>
+            </a:r>
+            <a:endParaRPr kumimoji="1" lang="en-US" altLang="ja-JP" sz="2400" dirty="0"/>
+          </a:p>
+          <a:p>
+            <a:endParaRPr lang="en-US" altLang="ja-JP" sz="2400" dirty="0"/>
+          </a:p>
+          <a:p>
+            <a:endParaRPr kumimoji="1" lang="ja-JP" altLang="en-US" sz="2400"/>
           </a:p>
         </p:txBody>
       </p:sp>
@@ -3929,6 +4293,64 @@
     <p:extLst>
       <p:ext uri="{BB962C8B-B14F-4D97-AF65-F5344CB8AC3E}">
         <p14:creationId xmlns:p14="http://schemas.microsoft.com/office/powerpoint/2010/main" val="1598116917"/>
+      </p:ext>
+    </p:extLst>
+  </p:cSld>
+  <p:clrMapOvr>
+    <a:masterClrMapping/>
+  </p:clrMapOvr>
+</p:sld>
+</file>
+
+<file path=ppt/slides/slide4.xml><?xml version="1.0" encoding="utf-8"?>
+<p:sld xmlns:a="http://schemas.openxmlformats.org/drawingml/2006/main" xmlns:r="http://schemas.openxmlformats.org/officeDocument/2006/relationships" xmlns:p="http://schemas.openxmlformats.org/presentationml/2006/main">
+  <p:cSld>
+    <p:spTree>
+      <p:nvGrpSpPr>
+        <p:cNvPr id="1" name=""/>
+        <p:cNvGrpSpPr/>
+        <p:nvPr/>
+      </p:nvGrpSpPr>
+      <p:grpSpPr>
+        <a:xfrm>
+          <a:off x="0" y="0"/>
+          <a:ext cx="0" cy="0"/>
+          <a:chOff x="0" y="0"/>
+          <a:chExt cx="0" cy="0"/>
+        </a:xfrm>
+      </p:grpSpPr>
+      <p:sp>
+        <p:nvSpPr>
+          <p:cNvPr id="2" name="タイトル 1">
+            <a:extLst>
+              <a:ext uri="{FF2B5EF4-FFF2-40B4-BE49-F238E27FC236}">
+                <a16:creationId xmlns:a16="http://schemas.microsoft.com/office/drawing/2014/main" id="{65BFBEAC-09B8-4E0D-D2C5-9A54EF82926D}"/>
+              </a:ext>
+            </a:extLst>
+          </p:cNvPr>
+          <p:cNvSpPr>
+            <a:spLocks noGrp="1"/>
+          </p:cNvSpPr>
+          <p:nvPr>
+            <p:ph type="title"/>
+          </p:nvPr>
+        </p:nvSpPr>
+        <p:spPr/>
+        <p:txBody>
+          <a:bodyPr/>
+          <a:lstStyle/>
+          <a:p>
+            <a:r>
+              <a:rPr kumimoji="1" lang="ja-JP" altLang="en-US"/>
+              <a:t>凸凹度合いの判定</a:t>
+            </a:r>
+          </a:p>
+        </p:txBody>
+      </p:sp>
+    </p:spTree>
+    <p:extLst>
+      <p:ext uri="{BB962C8B-B14F-4D97-AF65-F5344CB8AC3E}">
+        <p14:creationId xmlns:p14="http://schemas.microsoft.com/office/powerpoint/2010/main" val="2060014407"/>
       </p:ext>
     </p:extLst>
   </p:cSld>
